--- a/Martes-16/S02_Martes-16_3_Story_Encuesta-rapidez-o-validez_9x16.pptx
+++ b/Martes-16/S02_Martes-16_3_Story_Encuesta-rapidez-o-validez_9x16.pptx
@@ -3394,7 +3394,7 @@
                 </a:solidFill>
                 <a:latin typeface="Inter"/>
               </a:rPr>
-              <a:t>Respuesta: las dos.</a:t>
+              <a:t>Con Notaly: las dos.</a:t>
             </a:r>
           </a:p>
         </p:txBody>
